--- a/transfer/Motivatia_Proiect_Grupa5104.pptx
+++ b/transfer/Motivatia_Proiect_Grupa5104.pptx
@@ -136,13 +136,13 @@
   <p:extLst>
     <p:ext uri="{521415D9-36F7-43E2-AB2F-B90AF26B5E84}">
       <p14:sectionLst xmlns:p14="http://schemas.microsoft.com/office/powerpoint/2010/main">
-        <p14:section name="Introducere" id="{845c981a-07d6-89c4-f035-775e1f988ed5}">
+        <p14:section name="Introducere" id="{2ed985dc-3b1f-30c2-e3bf-39caea9aa4db}">
           <p14:sldIdLst>
             <p14:sldId id="256"/>
             <p14:sldId id="257"/>
           </p14:sldIdLst>
         </p14:section>
-        <p14:section name="Partea 1" id="{4772eb61-3772-4627-4fb5-f5b98e9b87ef}">
+        <p14:section name="Partea 1" id="{cfe31ec3-ecaf-dd27-dc0c-2f8400ddcd33}">
           <p14:sldIdLst>
             <p14:sldId id="258"/>
             <p14:sldId id="259"/>
@@ -152,7 +152,7 @@
             <p14:sldId id="263"/>
           </p14:sldIdLst>
         </p14:section>
-        <p14:section name="Partea 2" id="{4ee5d4fb-5725-b833-385c-5bf468a62278}">
+        <p14:section name="Partea 2" id="{d72f0363-544a-980a-5fce-86346a490af2}">
           <p14:sldIdLst>
             <p14:sldId id="264"/>
             <p14:sldId id="265"/>
@@ -162,7 +162,7 @@
             <p14:sldId id="269"/>
           </p14:sldIdLst>
         </p14:section>
-        <p14:section name="Partea 3" id="{f29cda82-3fa4-624a-045f-c0a3f2baa82f}">
+        <p14:section name="Partea 3" id="{c5c21004-2d01-11c6-3b78-6cc8664e9070}">
           <p14:sldIdLst>
             <p14:sldId id="270"/>
             <p14:sldId id="271"/>
@@ -172,7 +172,7 @@
             <p14:sldId id="275"/>
           </p14:sldIdLst>
         </p14:section>
-        <p14:section name="Partea 4" id="{588af9b8-36b6-d7fc-8d2e-65a52c537434}">
+        <p14:section name="Partea 4" id="{80416597-4610-7e8c-f635-8d4b62338cd7}">
           <p14:sldIdLst>
             <p14:sldId id="276"/>
             <p14:sldId id="277"/>
@@ -182,13 +182,13 @@
             <p14:sldId id="281"/>
           </p14:sldIdLst>
         </p14:section>
-        <p14:section name="Activitate practică" id="{1645a152-816c-c995-7927-d5de0ece7ae6}">
+        <p14:section name="Activitate practică" id="{581e4e47-96e8-88e7-a6b3-27130c980b61}">
           <p14:sldIdLst>
             <p14:sldId id="282"/>
             <p14:sldId id="283"/>
           </p14:sldIdLst>
         </p14:section>
-        <p14:section name="Încheiere" id="{912fbf0c-7a20-7fcb-4f96-5dc69e130749}">
+        <p14:section name="Încheiere" id="{6e041671-3341-c361-2214-107ea50479f0}">
           <p14:sldIdLst>
             <p14:sldId id="284"/>
             <p14:sldId id="285"/>
@@ -1089,7 +1089,7 @@
           <a:p>
             <a:r>
               <a:rPr lang="en-US" dirty="0"/>
-              <a:t>Prima este perspectiva behavioristă, legată de numele lui Skinner. Ideea centrală este simplă: un comportament urmat de o recompensă tinde să se repete, iar un comportament urmat de o pedeapsă sau de nimic tinde să dispară. Pentru Skinner, motivația este practic istoricul recompenselor și pedepselor pe care le-a primit cineva. Aplicarea în educație este evidentă: lauda, punctele, stelele, recompensele, feedbackul imediat. În sala de sport funcționează foarte bine: un „bravo” spus imediat după o execuție corectă întărește execuția. Limita se vede repede: dacă dispare recompensa, dispare și comportamentul. Elevul care face sport doar pentru notă se oprește când nu mai e notă.</a:t>
+              <a:t>Prima e cea behavioristă, a lui Skinner. Ideea e simplă: un comportament urmat de o recompensă tinde să se repete, iar un comportament urmat de o pedeapsă sau de nimic tinde să dispară. Pentru Skinner, motivația este practic istoricul recompenselor și pedepselor pe care le-a primit cineva. În școală asta înseamnă: laudă, puncte, steluțe, recompense, feedback pe loc. În sala de sport funcționează foarte bine: un „bravo” spus imediat după o execuție corectă întărește execuția. Limita se vede repede: dacă dispare recompensa, dispare și comportamentul. Elevul care face sport doar pentru notă se oprește când nu mai e notă.</a:t>
             </a:r>
             <a:endParaRPr lang="en-US" dirty="0"/>
           </a:p>
@@ -1177,7 +1177,7 @@
           <a:p>
             <a:r>
               <a:rPr lang="en-US" dirty="0"/>
-              <a:t>A doua perspectivă este cea umanistă, cu Abraham Maslow și celebra lui piramidă. Maslow spune că trebuințele umane sunt ierarhizate pe cinci niveluri. La bază, trebuințele fiziologice: hrană, apă, somn. Apoi siguranța: fizică și emoțională. Apoi apartenența: să fii acceptat de grup. Apoi stima: respectul celorlalți și respectul de sine. Și în vârf, autorealizarea: să devii ceea ce poți deveni. Regula este că o trebuință superioară apare abia după ce cele de bază sunt satisfăcute. Pentru profesor, concluzia este practică: un elev flămând, nedormit sau speriat nu este disponibil pentru învățare, oricât de bună ar fi lecția. Un copil care se teme că va fi luat în râs la ora de sport nu se va implica, pentru că nevoia lui de siguranță nu este satisfăcută. Întâi clasa trebuie să fie un loc sigur. Performanța vine după.</a:t>
+              <a:t>A doua e cea umanistă, cu Abraham Maslow și piramida lui, pe care sigur ați mai văzut-o. Maslow spune că nevoile omului sunt așezate pe cinci trepte. La bază, trebuințele fiziologice: hrană, apă, somn. Apoi siguranța: fizică și emoțională. Apoi apartenența: să fii acceptat de grup. Apoi stima: respectul celorlalți și respectul de sine. Și în vârf, autorealizarea: să devii ceea ce poți deveni. Regula e că treapta de sus apare abia după ce treptele de jos sunt rezolvate. Pentru profesor, asta înseamnă ceva foarte practic: un elev flămând, nedormit sau speriat nu este disponibil pentru învățare, oricât de bună ar fi lecția. Un copil căruia îi e frică că râd ceilalți de el la ora de sport nu se bagă, pentru că nu se simte în siguranță. Întâi clasa trebuie să fie un loc sigur. Performanța vine după.</a:t>
             </a:r>
             <a:endParaRPr lang="en-US" dirty="0"/>
           </a:p>
@@ -1265,7 +1265,7 @@
           <a:p>
             <a:r>
               <a:rPr lang="en-US" dirty="0"/>
-              <a:t>A treia este perspectiva cognitivă, care pune accent pe cum gândim despre succes și eșec. Atkinson a descris motivația de realizare ca rezultatul a două forțe opuse: nevoia de succes și teama de eșec. Elevii la care domină nevoia de succes aleg sarcini de dificultate medie, unde reușita depinde de ei. Cei la care domină teama de eșec aleg fie sarcini foarte ușoare, fie imposibil de grele, pentru că în ambele cazuri nu pot fi învinovățiți. Weiner a dus ideea mai departe cu teoria atribuirii: contează enorm cui atribuim reușita sau eșecul. Dacă un elev atribuie eșecul la ceva intern și controlabil, de exemplu „nu m-am antrenat suficient”, motivația rămâne intactă, pentru că data viitoare poate schimba ceva. Dacă atribuie eșecul la ceva stabil și necontrolabil, „nu am talent”, sau la ceva extern, „arbitrul a fost părtinitor”, motivația se stinge, pentru că nu mai are ce să facă. De aici iese o regulă simplă pentru profesor: lauzi efortul, nu talentul.</a:t>
+              <a:t>A treia e cea cognitivă, care se uită la cum gândim despre reușită și eșec. Atkinson spune că în noi se bat două forțe: dorința de a reuși și frica de a greși. Elevii la care e mai tare dorința de a reuși aleg sarcini mijlocii, unde reușita depinde de ei. Cei la care e mai tare frica aleg ori ceva foarte ușor, ori ceva imposibil, pentru că în ambele cazuri nu-i poate învinovăți nimeni. Weiner a dus ideea mai departe cu teoria atribuirii, adică pe cine dai vina. Contează enorm. Dacă elevul își spune „am pierdut pentru că nu m-am antrenat destul”, motivația rămâne, pentru că data viitoare poate schimba ceva. Dacă își spune „n-am talent” sau „arbitrul a fost părtinitor”, motivația moare, pentru că nu mai are ce face. De aici iese o regulă simplă pentru profesor: lauzi efortul, nu talentul.</a:t>
             </a:r>
             <a:endParaRPr lang="en-US" dirty="0"/>
           </a:p>
@@ -1353,7 +1353,7 @@
           <a:p>
             <a:r>
               <a:rPr lang="en-US" dirty="0"/>
-              <a:t>A patra perspectivă este teoria autodeterminării, a lui Deci și Ryan, probabil cea mai influentă teorie a motivației din ultimii patruzeci de ani. Ei spun că oamenii au trei nevoi psihologice de bază. Autonomia: să simți că tu alegi, că nu ești împins. Competența: să simți că te descurci, că progresezi. Relaționarea: să te simți legat de ceilalți, acceptat. Când aceste trei nevoi sunt satisfăcute, motivația devine intrinsecă și durabilă. Când sunt frustrate, apare ceea ce ei numesc amotivare: elevul nu mai vede sensul. Teoria descrie și un continuum: de la amotivare, prin diferite forme de motivație extrinsecă, până la motivația intrinsecă. Un profesor poate muta elevul pe acest continuum dându-i alegeri, sarcini pe măsura lui și un climat în care se simte parte din grup.</a:t>
+              <a:t>A patra e teoria autodeterminării, a lui Deci și Ryan, probabil cea mai folosită teorie a motivației din ultimii patruzeci de ani. Ei spun că toți oamenii au trei nevoi de bază. Autonomia: să simți că tu alegi, că nu ești împins. Competența: să simți că te descurci, că progresezi. Relaționarea: să te simți legat de ceilalți, acceptat. Când aceste trei nevoi sunt satisfăcute, motivația devine intrinsecă și durabilă. Când nu sunt împlinite, apare ce ei numesc amotivare: elevul nu mai vede rostul. Teoria descrie și o scară: de la lipsa totală de motivație, prin motivația din exterior, până la cea din interior. Profesorul poate urca elevul pe scara asta dându-i de ales, sarcini pe măsura lui și un grup în care se simte acceptat.</a:t>
             </a:r>
             <a:endParaRPr lang="en-US" dirty="0"/>
           </a:p>
@@ -1441,7 +1441,7 @@
           <a:p>
             <a:r>
               <a:rPr lang="en-US" dirty="0"/>
-              <a:t>A cincea perspectivă este teoria autoeficacității, a lui Albert Bandura. Autoeficacitatea este încrederea că „pot face asta”, într-o situație concretă. Bandura a arătat că această încredere prezice mai bine decât aptitudinea reală cât efort depune cineva și cât timp perseverează. Autoeficacitatea are patru surse. Cea mai puternică este experiența proprie a reușitei: dacă am reușit, cred că pot din nou. A doua este observarea unor modele asemănătoare cu mine: dacă un coleg ca mine a reușit, pot și eu. A treia este încurajarea verbală a cuiva în care am încredere. A patra este starea fizică și emoțională: oboseala și anxietatea scad încrederea. Pentru educația fizică, concluzia practică este să construim sarcini progresive, cu reușită garantată la început, ca elevul să adune experiențe de succes.</a:t>
+              <a:t>A cincea e teoria autoeficacității, a lui Albert Bandura. Autoeficacitate înseamnă, simplu, încrederea că „pot face asta”. Bandura a arătat că încrederea asta spune mai bine decât talentul real cât se va strădui cineva și cât timp va rezista. Încrederea asta vine din patru locuri. Cel mai tare: am reușit eu înainte, deci cred că pot din nou. Al doilea: văd pe cineva ca mine că reușește, deci pot și eu. Al treilea: mă încurajează cineva în care am încredere. Al patrulea: cum mă simt fizic, oboseala și emoțiile scad încrederea. Pentru educația fizică asta înseamnă sarcini din ce în ce mai grele, dar cu reușită sigură la început, ca elevul să adune reușite.</a:t>
             </a:r>
             <a:endParaRPr lang="en-US" dirty="0"/>
           </a:p>
@@ -1530,7 +1530,7 @@
             <a:r>
               <a:rPr lang="en-US" dirty="0"/>
               <a:t>Slide de tranziție. Membrul 3 preia cuvântul.
-Mulțumesc. Până acum am văzut ce este motivația și cum o explică teoriile. Eu voi vorbi despre rolul ei în activitatea instructiv-educativă, adică în ceea ce se întâmplă efectiv la clasă și în sala de sport, între profesor, elev și conținutul de învățat.</a:t>
+Mulțumesc. Până acum am văzut ce este motivația și cum o explică teoriile. Eu vorbesc despre rolul ei în activitatea instructiv-educativă, adică, pe românește, în ce se întâmplă la oră, între profesor, elev și ce e de învățat.</a:t>
             </a:r>
             <a:endParaRPr lang="en-US" dirty="0"/>
           </a:p>
@@ -1618,7 +1618,7 @@
           <a:p>
             <a:r>
               <a:rPr lang="en-US" dirty="0"/>
-              <a:t>Putem privi lecția ca un triunghi cu trei vârfuri: elevul, profesorul și conținutul. Motivația circulă între ele. Elevul vine la oră cu propria lui structură motivațională, cea descrisă de colega mea în prima parte: trebuințe, interese, temeri, convingeri despre sine. Profesorul nu este un observator neutru: el creează climatul și este el însuși un model. Un profesor care vine plictisit la oră transmite plictiseala. Unul căruia îi place ce face transmite și asta, fără să vrea. Iar conținutul, fie că e un exercițiu de gimnastică sau o regulă de joc, devine atractiv sau respingător în funcție de cum este prezentat. Învățarea eficientă apare doar la intersecția celor trei.</a:t>
+              <a:t>Putem privi lecția ca un triunghi cu trei vârfuri: elevul, profesorul și conținutul. Motivația umblă între ele. Elevul vine la oră cu ce are el: nevoi, interese, frici, păreri despre sine, cum a arătat colega mea în prima parte. Profesorul nu stă pe margine: el face atmosfera și e el însuși un exemplu. Un profesor care vine plictisit la oră transmite plictiseala. Unul căruia îi place ce face transmite și asta, fără să vrea. Iar ce e de învățat, fie că e un exercițiu de gimnastică sau o regulă de joc, place sau nu place în funcție de cum e prezentat. Învățarea adevărată se întâmplă doar unde se întâlnesc toate trei.</a:t>
             </a:r>
             <a:endParaRPr lang="en-US" dirty="0"/>
           </a:p>
@@ -1706,7 +1706,7 @@
           <a:p>
             <a:r>
               <a:rPr lang="en-US" dirty="0"/>
-              <a:t>Să ne uităm mai atent la motivația pentru învățare a elevului. Ioan Neacșu, în lucrarea lui despre motivație și învățare, descrie mai multe categorii de motive. Motivele cognitive: curiozitatea, dorința de a înțelege cum funcționează ceva. Motivele afective: dorința de a fi apreciat de profesor, de a fi acceptat de colegi. Motivele de autorealizare: a deveni mai bun, a se depăși pe sine. Și, din păcate, motivele negative: teama de notă slabă, de pedeapsă, de rușine în fața clasei. Motivele negative merg pe termen scurt, dar au un cost. Elevul învață să evite, nu să caute. Când tot ce îl mișcă este frica, în momentul în care dispare controlul dispare și efortul.</a:t>
+              <a:t>Să ne uităm mai atent la ce îl face pe elev să învețe. Ioan Neacșu, în cartea lui despre motivație și învățare, descrie mai multe feluri de motive. Cele cognitive: curiozitatea, vrei să înțelegi cum merge ceva. Cele afective: vrei să te aprecieze profesorul, să te accepte colegii. Cele de autorealizare: vrei să fii mai bun, să te depășești. Și, din păcate, cele negative: teama de notă slabă, de pedeapsă, de rușine în fața clasei. Motivele negative merg pe termen scurt, dar au un cost. Elevul învață să evite, nu să caute. Când tot ce îl mișcă este frica, în momentul în care dispare controlul dispare și efortul.</a:t>
             </a:r>
             <a:endParaRPr lang="en-US" dirty="0"/>
           </a:p>
@@ -1794,7 +1794,7 @@
           <a:p>
             <a:r>
               <a:rPr lang="en-US" dirty="0"/>
-              <a:t>Educația fizică are un specific aparte, pe care Mihai Epuran l-a descris pe larg în psihologia sportului. În sport, motivația se vede direct, în efort fizic măsurabil. Nu te poți preface că alergi. Asta face sportul un teren excelent pentru a observa și a educa motivația. Un alt aspect: plăcerea mișcării este un motiv intrinsec natural la copii. Copiii mici aleargă de plăcere. Această plăcere se pierde însă dacă este sufocată de exerciții monotone, de comparații permanente și de critică. Mulți adolescenți care spun că urăsc sportul au iubit mișcarea la cinci ani. Cineva i-a dezvățat pe drum. Apoi competiția: motivează puternic pe unii elevi și blochează complet pe alții, mai ales pe cei care pierd mereu. Și nu în ultimul rând, în sport corpul este expus privirii celorlalți. Rușinea legată de corp este unul dintre cei mai puternici demotivatori la vârsta adolescenței, și profesorul trebuie să țină cont de asta când organizează activitățile.</a:t>
+              <a:t>Educația fizică e altfel decât celelalte materii, și Mihai Epuran a scris mult despre asta. În sport, motivația se vede direct, în efort. Nu te poți preface că alergi. De asta sportul e un loc foarte bun ca să vezi motivația și ca să o crești. Alt lucru: copiilor le place să se miște de la natură. Copiii mici aleargă de plăcere. Plăcerea asta se pierde dacă e sufocată de exerciții plictisitoare, de comparații mereu cu alții și de critică. Mulți adolescenți care spun că urăsc sportul au iubit mișcarea la cinci ani. Cineva i-a dezvățat pe drum. Apoi întrecerea: pe unii elevi îi pornește tare, pe alții îi blochează de tot, mai ales pe cei care pierd mereu. Și încă ceva: în sport corpul e la vedere. La adolescenți, rușinea de propriul corp e una dintre cele mai mari frâne, și profesorul trebuie să țină cont de asta când face activitățile.</a:t>
             </a:r>
             <a:endParaRPr lang="en-US" dirty="0"/>
           </a:p>
@@ -1882,7 +1882,7 @@
           <a:p>
             <a:r>
               <a:rPr lang="en-US" dirty="0"/>
-              <a:t>Aici intervine conceptul de climat motivațional, dezvoltat de Carole Ames și aplicat în sport de Joan Duda. Există două tipuri de climat pe care profesorul le creează, de multe ori fără să-și dea seama. Climatul orientat spre măiestrie este cel în care succesul înseamnă progresul propriu, efortul depus, faptul că ai învățat ceva nou. Climatul orientat spre ego este cel în care succesul înseamnă a fi mai bun decât ceilalți. Cercetările sunt clare: climatul de măiestrie produce perseverență, plăcere și mai puțină anxietate, la toți elevii. Climatul de ego motivează doar pe cei câțiva care câștigă mereu, iar pe restul îi învață să evite activitatea. Asta nu înseamnă că scoatem competiția. Ne întrecem în continuare, dar ce se numără la final este cu cât ai progresat tu față de tine.</a:t>
+              <a:t>Aici apare ideea de climat motivațional, de la Carole Ames, dusă în sport de Joan Duda. Climat înseamnă atmosfera de la oră, și profesorul o face, de multe ori fără să-și dea seama, în unul din două feluri. Climatul de măiestrie: reușita înseamnă că ai progresat tu, că te-ai străduit, că ai învățat ceva nou. Climatul de ego: reușita înseamnă că ești mai bun decât ceilalți. Studiile sunt clare. În climatul de măiestrie elevii rezistă mai mult, le place mai mult și au mai puține emoții, toți. Climatul de ego îi pornește doar pe cei câțiva care câștigă mereu, iar pe restul îi învață să se ferească. Asta nu înseamnă că scoatem competiția. Ne întrecem în continuare, dar ce se numără la final este cu cât ai progresat tu față de tine.</a:t>
             </a:r>
             <a:endParaRPr lang="en-US" dirty="0"/>
           </a:p>
@@ -2058,7 +2058,7 @@
           <a:p>
             <a:r>
               <a:rPr lang="en-US" dirty="0"/>
-              <a:t>Pentru a construi un climat de măiestrie există un model practic, cunoscut sub acronimul TARGET, propus de Epstein și dezvoltat de Ames. Fiecare literă este o pârghie pe care profesorul o controlează. T, de la Task, sarcina: sarcini variate, cu dificultate adaptată, ca fiecare să aibă ceva de câștigat. A, de la Authority, autoritate: elevii au un cuvânt de spus, pot alege între variante. R, de la Recognition, recunoaștere: recunoaștem progresul și efortul, de preferat în privat, nu doar pe cei mai buni în fața tuturor. G, de la Grouping, grupare: grupuri mixte, schimbate des, nu „cei buni” și „cei slabi”. E, de la Evaluation, evaluare: raportată la propriul progres, nu la clasament. T, de la Time, timp: timp suficient pentru a învăța, fără grabă. Un profesor care trece prin aceste șase pârghii când își planifică lecția construiește, aproape automat, un climat în care elevii vin cu plăcere.</a:t>
+              <a:t>Ca să faci un climat de măiestrie există un model practic, TARGET, de la Epstein și Ames. Fiecare literă e un buton pe care îl are profesorul în mână. T, de la Task, sarcina: sarcini variate, cu dificultate adaptată, ca fiecare să aibă ceva de câștigat. A, de la Authority, autoritate: elevii au un cuvânt de spus, pot alege între variante. R, de la Recognition, recunoaștere: recunoaștem progresul și efortul, de preferat în privat, nu doar pe cei mai buni în fața tuturor. G, de la Grouping, grupare: grupuri mixte, schimbate des, nu „cei buni” și „cei slabi”. E, de la Evaluation, evaluare: raportată la propriul progres, nu la clasament. T, de la Time, timp: timp suficient pentru a învăța, fără grabă. Un profesor care trece prin cele șase litere când își pregătește ora face, aproape fără să vrea, o atmosferă în care elevii vin cu plăcere.</a:t>
             </a:r>
             <a:endParaRPr lang="en-US" dirty="0"/>
           </a:p>
@@ -2147,7 +2147,7 @@
             <a:r>
               <a:rPr lang="en-US" dirty="0"/>
               <a:t>Slide de tranziție. Membrul 4 preia cuvântul.
-Mulțumesc. Am ajuns la partea cea mai practică: ce face concret profesorul ca să motiveze. Voi prezenta cinci grupuri de tehnici și apoi un studiu de caz. Toate vin din teoriile prezentate de colegii mei și o să spun la fiecare de unde vine.</a:t>
+Mulțumesc. Am ajuns la partea cea mai practică: ce face profesorul, concret, ca să motiveze. Prezint cinci lucruri și apoi un caz real. Toate vin din teoriile prezentate de colegii mei și spun la fiecare de unde vine.</a:t>
             </a:r>
             <a:endParaRPr lang="en-US" dirty="0"/>
           </a:p>
@@ -2235,7 +2235,7 @@
           <a:p>
             <a:r>
               <a:rPr lang="en-US" dirty="0"/>
-              <a:t>Prima tehnică este stabilirea obiectivelor. Cercetările lui Locke și Latham au arătat că obiectivele concrete și măsurabile produc rezultate mult mai bune decât îndemnul vag „fă tot ce poți”. „Săptămâna asta vreau să faci zece flotări corecte” funcționează. „Încearcă mai mult” nu. Obiectivele trebuie să fie pe mai multe orizonturi: pentru ora de azi, pentru luna asta, pentru semestru, ca elevul să vadă legătura dintre efortul de azi și rezultatul de mâine. Dificultatea trebuie să fie moderată: puțin peste ce poate elevul acum, nici prea ușor să se plictisească, nici prea greu să renunțe. Vă amintiți de legea optimului și de autoeficacitatea lui Bandura. Și foarte important: elevul își fixează singur o parte din obiective. Asta satisface nevoia de autonomie din teoria lui Deci și Ryan, iar un obiectiv pe care l-ai ales singur îl aperi altfel.</a:t>
+              <a:t>Primul lucru e stabilirea obiectivelor. Locke și Latham au arătat că un obiectiv concret, pe care îl poți număra, dă rezultate mult mai bune decât un „fă tot ce poți”. „Săptămâna asta vreau să faci zece flotări corecte” funcționează. „Încearcă mai mult” nu. Obiectivele trebuie să fie și pe azi, și pe luna asta, și pe semestru, ca elevul să vadă legătura dintre ce face azi și ce iese mâine. Greutatea trebuie să fie potrivită: puțin peste ce poate acum, nici prea ușor să se plictisească, nici prea greu să se lase. Vă amintiți de legea optimului și de încrederea despre care vorbea Bandura. Și foarte important: elevul își pune singur o parte din obiective. Asta e nevoia de a alege de la Deci și Ryan, iar un obiectiv pe care l-ai ales tu îl aperi altfel.</a:t>
             </a:r>
             <a:endParaRPr lang="en-US" dirty="0"/>
           </a:p>
@@ -2323,7 +2323,7 @@
           <a:p>
             <a:r>
               <a:rPr lang="en-US" dirty="0"/>
-              <a:t>A doua tehnică este feedbackul și recunoașterea. Feedbackul bun are trei calități: este imediat, este concret și este legat de comportament. „Genunchii mai sus la săritură” este un feedback. „Mai bine” nu este. Apoi, lăudăm efortul și progresul, nu talentul: „se vede că ai exersat” în loc de „ești talentat”. Carol Dweck a arătat că elevii lăudați pentru talent devin fricoși, pentru că orice eșec le amenință eticheta, iar cei lăudați pentru efort caută provocări. Asta este exact teoria atribuirii pusă în practică. O regulă utilă este raportul trei la unu: trei observații pozitive la una corectivă. Corecția trebuie să existe, altfel feedbackul devine gol, dar ea se aude mai bine când vine pe un fond pozitiv. Cât despre recompensele extrinseci, puncte, diplome, premii: le folosim rar, pentru progres, nu pentru a fi primul, altfel ucidem motivația intrinsecă a celor care nu ajung niciodată primii.</a:t>
+              <a:t>Al doilea lucru e feedbackul, adică ce îi spui elevului după ce a făcut ceva. Feedbackul bun e pe loc, concret și despre ce a făcut, nu despre el ca om. „Genunchii mai sus la săritură” este un feedback. „Mai bine” nu este. Apoi, lăudăm efortul și progresul, nu talentul: „se vede că ai exersat” în loc de „ești talentat”. Carol Dweck a arătat că elevii lăudați pentru talent devin fricoși, pentru că orice greșeală le strică eticheta, iar cei lăudați pentru efort caută lucruri mai grele. E exact teoria atribuirii, pusă în practică. O regulă bună e trei la unu: trei lucruri bune la unul de corectat. Corectatul trebuie să existe, altfel lauda nu mai valorează nimic, dar se aude mai bine după ce ai spus și ce a fost bine. Cât despre recompense, puncte, diplome, premii: rar, pentru progres, nu pentru locul întâi, altfel le omorâm cheful celor care nu ajung niciodată primii.</a:t>
             </a:r>
             <a:endParaRPr lang="en-US" dirty="0"/>
           </a:p>
@@ -2411,7 +2411,7 @@
           <a:p>
             <a:r>
               <a:rPr lang="en-US" dirty="0"/>
-              <a:t>A treia tehnică grupează autonomia, varietatea și jocul. Autonomia înseamnă să oferim alegeri, chiar mici: între două exerciții, în ce ordine parcurg stațiile, cu cine fac pereche. Alegerea nu costă nimic și schimbă mult implicarea. Varietatea răspunde la nevoia de noutate: altă structură a orei, alt joc, altă muzică la încălzire. Monotonia omoară motivația mai sigur decât orice. Jocul este cel mai puternic motivator intrinsec, la toate vârstele, nu doar la copii mici. Un exercițiu de viteză plictisitor devine palpitant când este un joc de prins. Iar învățarea prin descoperire, una dintre metodele care apar chiar în programa acestui curs, înseamnă să lăsăm elevul să găsească el soluția: „cum ai putea să arunci mai departe?”, în loc să-i spunem de la început tehnica. Ce descoperi singur ține mai mult.</a:t>
+              <a:t>Al treilea lucru: libertatea de a alege, varietatea și jocul. Libertatea înseamnă să le dai de ales, chiar lucruri mici: între două exerciții, în ce ordine parcurg stațiile, cu cine fac pereche. Nu te costă nimic și schimbă mult cât se bagă elevul. Varietatea: altă ordine a orei, alt joc, altă muzică la încălzire. Monotonia omoară motivația mai sigur decât orice. Jocul e cel mai puternic motor, la toate vârstele, nu doar la cei mici. Un exercițiu de viteză plictisitor devine interesant când e un joc de prins. Iar învățarea prin descoperire, una dintre metodele din programa cursului, înseamnă să-l lași pe elev să găsească el soluția: „cum ai putea să arunci mai departe?”, în loc să-i spui tu de la început cum se face. Ce descoperi singur ții minte mai mult.</a:t>
             </a:r>
             <a:endParaRPr lang="en-US" dirty="0"/>
           </a:p>
@@ -2499,7 +2499,7 @@
           <a:p>
             <a:r>
               <a:rPr lang="en-US" dirty="0"/>
-              <a:t>A patra tehnică este profesorul însuși, ca model, și climatul emoțional pe care îl creează. Entuziasmul profesorului se ia. Din păcate și plictiseala lui. Elevii simt imediat dacă profesorului îi place ce face. Apoi lucrurile mici care satisfac nevoia de relaționare: umorul, folosirea numelor, un cuvânt spus fiecăruia, nu doar celor buni. Și o regulă de climat: greșeala este normală și necesară, face parte din învățare, nu este motiv de rușine. Asta înseamnă fără ridiculizare și fără comparații publice. Un singur moment de ridicol în fața clasei poate strica luni de muncă. Aici lucrăm pe nivelul de siguranță și apartenență din piramida lui Maslow.</a:t>
+              <a:t>Al patrulea lucru e profesorul însuși, ca exemplu, și atmosfera pe care o face. Entuziasmul profesorului se ia. Din păcate și plictiseala lui. Elevii simt imediat dacă profesorului îi place ce face. Apoi lucrurile mici care îl fac pe elev să se simtă al grupului: o glumă, să-i spui pe nume, un cuvânt pentru fiecare, nu doar pentru cei buni. Și o regulă: greșeala e normală, face parte din învățat, nu e motiv de rușine. Adică fără să faci pe cineva de râs și fără comparații în fața clasei. Un singur moment de râs în fața clasei poate strica luni de muncă. Aici suntem pe treptele de siguranță și de apartenență din piramida lui Maslow.</a:t>
             </a:r>
             <a:endParaRPr lang="en-US" dirty="0"/>
           </a:p>
@@ -2587,7 +2587,7 @@
           <a:p>
             <a:r>
               <a:rPr lang="en-US" dirty="0"/>
-              <a:t>Să vedem cum se leagă totul într-un studiu de caz, care este și una dintre metodele cursului. Andrei, 14 ani, clasa a opta. Refuză să participe la ora de sport, stă pe margine, spune că „nu-i place sportul”, aduce scutiri. Un profesor behaviorist ar scădea nota. Să încercăm altfel. Diagnosticul, folosind ce am învățat: Andrei a avut experiențe repetate de eșec public, a fost ales ultimul în echipă, a fost luat în râs când a ratat. Autoeficacitatea lui este la pământ, atribuie eșecul la „n-am talent” și are o teamă puternică de ridicol. Nu-i lipsește motivația. Are o motivație de evitare foarte puternică, ceea ce e altceva. Intervenția, pe șase săptămâni. Prima: sarcini cu reușită garantată, lucru individual la început, fără privitori. A doua: un rol în echipă care nu îl expune, de exemplu arbitru sau cronometror, ca să fie în grup fără să fie evaluat, și abia apoi, treptat, jucător. A treia: feedback exclusiv pe efort și progres, în privat. A patra: zero expunere publică, echipe făcute de profesor, nu alese de elevi. Rezultatul: după șase săptămâni Andrei participă la toate orele, iar în săptămâna a șasea a propus el un joc pentru clasă. Nu l-a făcut nimeni sportiv. L-a adus cineva înapoi în zona în care mișcarea e sigură și plăcută, atât.</a:t>
+              <a:t>Să vedem cum se leagă totul într-un studiu de caz, care e și una dintre metodele cursului. Andrei, 14 ani, clasa a opta. Nu vrea să facă sport, stă pe margine, zice că „nu-i place sportul”, aduce scutiri. Un profesor de modă veche i-ar scădea nota. Să încercăm altfel. Ce aflăm, cu ce am învățat: Andrei a greșit de multe ori în fața tuturor, a fost ales ultimul în echipă, au râs de el când a ratat. Nu mai are nicio încredere că poate, dă vina pe „n-am talent” și îi e tare frică să nu râdă lumea de el. Nu-i lipsește motivația. Are o motivație foarte puternică de a se feri, ceea ce e altceva. Ce facem, în șase săptămâni. Unu: sarcini la care sigur reușește, singur la început, fără privitori. Doi: un rol în echipă care nu-l pune în față, arbitru sau cronometror, ca să fie în grup fără să-l judece nimeni, și abia apoi, încet, jucător. Trei: îi spui doar despre efort și progres, și doar între patru ochi. Patru: zero expunere în fața clasei, echipele le face profesorul, nu le aleg elevii. Rezultatul: după șase săptămâni Andrei vine la toate orele, iar în săptămâna a șasea a propus el un joc pentru clasă. Nu l-a făcut nimeni sportiv. L-a adus cineva înapoi în zona în care mișcarea e sigură și plăcută, atât.</a:t>
             </a:r>
             <a:endParaRPr lang="en-US" dirty="0"/>
           </a:p>
@@ -2675,7 +2675,7 @@
           <a:p>
             <a:r>
               <a:rPr lang="en-US" dirty="0"/>
-              <a:t>Un circuit cu patru stații, în care fiecare stație ilustrează o tehnică motivațională. Participanții o trăiesc, nu doar o ascultă.
+              <a:t>Un circuit cu patru stații, în care fiecare stație ilustrează o tehnică motivațională. Așa se vede cu ochii, nu doar se aude.
 Organizare: Grupa se împarte în 2-3 echipe de 4-6 persoane. Fiecare echipă pornește de la altă stație și le parcurge pe toate, 2-3 minute la fiecare. Un membru al grupului de proiect coordonează fiecare stație.
 Materiale: 4 conuri sau markere pentru stații, un cronometru, 8-12 cartonașe cu afirmații, o foaie și un pix pentru fiecare echipă</a:t>
             </a:r>
@@ -2946,7 +2946,7 @@
             <a:r>
               <a:rPr lang="en-US" dirty="0"/>
               <a:t>Slide de tranziție. Membrul 1 preia cuvântul.
-Bună ziua. Proiectul nostru tratează motivația și rolul ei în activitatea umană, cu accent pe ce înseamnă ea în educație și în educația fizică. Eu voi deschide cu partea de bază: ce este motivația, din ce este formată și cum funcționează. Colegii mei vor continua cu teoriile care o explică, cu rolul ei în activitatea instructiv-educativă și cu tehnicile concrete pe care un profesor le poate folosi la clasă sau în sala de sport. La final vom face împreună o activitate practică.</a:t>
+Bună ziua. Proiectul nostru e despre motivație: ce este, de ce avem nevoie de ea și cum o folosește un profesor, mai ales la educație fizică. Eu încep cu partea de bază: ce este motivația, din ce e făcută și cum merge. Colegii mei continuă cu teoriile care o explică, cu rolul ei la ore și cu ce poate face concret un profesor la clasă sau în sala de sport. La final vom face împreună o activitate practică.</a:t>
             </a:r>
             <a:endParaRPr lang="en-US" dirty="0"/>
           </a:p>
@@ -3122,7 +3122,7 @@
           <a:p>
             <a:r>
               <a:rPr lang="en-US" dirty="0"/>
-              <a:t>Să pornim de la o situație simplă. Doi elevi din aceeași clasă, cu aceeași constituție fizică, primesc aceeași sarcină: să alerge 800 de metri. Unul termină, celălalt se oprește după două ture. Diferența nu este de capacitate. Diferența este de motivație. Asta ne arată de la început de ce subiectul contează: motivația este ceea ce transformă o capacitate în rezultat. Fără ea, orice talent rămâne nefolosit.</a:t>
+              <a:t>Să pornim de la o situație simplă. Doi elevi din aceeași clasă, cam la fel de bine făcuți, primesc aceeași sarcină: să alerge 800 de metri. Unul termină, celălalt se oprește după două ture. Diferența nu e că unul poate și celălalt nu. Diferența e de motivație. Și de asta contează subiectul: motivația e cea care face dintr-un lucru pe care îl poți un lucru pe care chiar îl faci. Fără ea, orice talent rămâne nefolosit.</a:t>
             </a:r>
             <a:endParaRPr lang="en-US" dirty="0"/>
           </a:p>
@@ -3210,7 +3210,7 @@
           <a:p>
             <a:r>
               <a:rPr lang="en-US" dirty="0"/>
-              <a:t>Definiția cu care lucrăm este următoarea: motivația este ansamblul factorilor interni care declanșează, orientează și mențin comportamentul. Trei verbe aici. Motivația ne pune în mișcare, ne arată încotro și ne ține acolo când vine greul. Ea răspunde la întrebarea „de ce” facem ceva, nu la „cum” facem. Un lucru important: motivația nu se vede direct. Nu-i poți lua cuiva motivația ca pe tensiune, cu un aparat. O deducem din ce face: cât efort depune, cât timp rezistă și ce alege când are de ales.</a:t>
+              <a:t>Definiția cu care lucrăm e asta: motivația e tot ce ne pune în mișcare din interior, ne dă o direcție și ne ține pe drum. Trei lucruri, deci: ne pornește, ne arată încotro și ne ține acolo când vine greul. Motivația răspunde la întrebarea „de ce” facem ceva, nu la „cum” facem. Un lucru important: motivația nu se vede direct. Nu-i poți lua cuiva motivația ca pe tensiune, cu un aparat. O deducem din ce face: cât efort depune, cât timp rezistă și ce alege când are de ales.</a:t>
             </a:r>
             <a:endParaRPr lang="en-US" dirty="0"/>
           </a:p>
@@ -3298,7 +3298,7 @@
           <a:p>
             <a:r>
               <a:rPr lang="en-US" dirty="0"/>
-              <a:t>Al doilea punct este structura motivațională a personalității. În psihologia românească, la Cosmovici sau Zlate, motivația este descrisă ca un sistem cu mai multe niveluri. La bază stau trebuințele: lipsa a ceva, resimțită ca o tensiune. Trebuința de apă, de hrană, de mișcare, dar și trebuința de apartenență la un grup sau de apreciere. Când o trebuință devine conștientă și se leagă de un obiect anume, se transformă în motiv. Motivul este cel care împinge efectiv spre acțiune. Mai sus sunt interesele, orientări stabile și selective spre un domeniu: cineva are interes pentru sport, altcineva pentru muzică. Interesele se formează în timp și dau constanță. Apoi convingerile, idei puternice, cu încărcătură afectivă, pe care le apărăm: de exemplu convingerea că munca se răsplătește. Și în vârf, idealurile și aspirațiile: modelul de om și de viață spre care tindem. Un copil care vrea „să ajungă ca antrenorul lui” are un ideal care îi organizează toată activitatea.</a:t>
+              <a:t>Al doilea punct e structura motivațională a personalității. Sună greu, dar înseamnă doar că motivația nu e un singur lucru, ci mai multe, așezate pe niveluri, de la cele simple la cele mari. Așa o descriu Cosmovici și Zlate. La bază stau trebuințele: îți lipsește ceva și simți asta. Trebuința de apă, de hrană, de mișcare, dar și trebuința de apartenență la un grup sau de apreciere. Când îți dai seama ce îți lipsește și te gândești la un lucru anume care ți-ar rezolva lipsa, trebuința devine motiv. Motivul e cel care te împinge efectiv să faci ceva. Mai sus sunt interesele: lucrurile spre care te tragi mereu, unul spre sport, altul spre muzică. Se formează în timp și te țin constant. Apoi convingerile, idei la care ții și pe care le aperi: de exemplu convingerea că munca se răsplătește. Și în vârf, idealurile: cum ai vrea să fii și ce ai vrea să ajungi. Un copil care vrea „să ajungă ca antrenorul lui” are un ideal care îi pune în ordine tot ce face.</a:t>
             </a:r>
             <a:endParaRPr lang="en-US" dirty="0"/>
           </a:p>
@@ -3386,7 +3386,7 @@
           <a:p>
             <a:r>
               <a:rPr lang="en-US" dirty="0"/>
-              <a:t>De ce contează structura asta pentru un profesor? Pentru că fiecare elev are propria configurație. La unul domină trebuința de afirmare, la altul trebuința de siguranță, la altul interesul pur pentru joc. Același stimul, de exemplu o competiție, îl activează pe primul și îl blochează pe al doilea. Un profesor bun învață să citească structura motivațională a fiecărui elev.</a:t>
+              <a:t>De ce contează asta pentru un profesor? Pentru că fiecare elev e aranjat altfel. Unul vrea să se afirme, altul vrea să se simtă în siguranță, altuia îi place pur și simplu jocul. Același lucru, de exemplu o întrecere, pe primul îl pornește și pe al doilea îl blochează. Un profesor bun învață să citească ce îl mișcă pe fiecare elev.</a:t>
             </a:r>
             <a:endParaRPr lang="en-US" dirty="0"/>
           </a:p>
@@ -3474,7 +3474,7 @@
           <a:p>
             <a:r>
               <a:rPr lang="en-US" dirty="0"/>
-              <a:t>Motivația îndeplinește patru funcții. Prima este activarea: ne scoate din starea de repaus, ne dă energie. A doua este orientarea: alege o direcție, un scop. A treia este susținerea: menține efortul în timp, chiar când apar obstacole. A patra este reglarea: ajustează intensitatea efortului după situație. Când un sportiv dozează efortul într-o cursă lungă, aici lucrează funcția de reglare.</a:t>
+              <a:t>Motivația face patru lucruri. Unu, activarea: ne scoate din stat și ne dă energie. Doi, orientarea: alege o direcție, un scop. Trei, susținerea: ține efortul în timp, chiar când apar piedici. Patru, reglarea: potrivește efortul după situație. Când un sportiv își dozează puterile într-o cursă lungă, asta e reglarea.</a:t>
             </a:r>
             <a:endParaRPr lang="en-US" dirty="0"/>
           </a:p>
@@ -3563,7 +3563,7 @@
             <a:r>
               <a:rPr lang="en-US" dirty="0"/>
               <a:t>Slide de tranziție. Membrul 2 preia cuvântul.
-Mulțumesc. Colega mea a explicat ce este motivația. Eu voi prezenta cum a fost ea explicată de principalele școli de gândire din psihologie. Nu există o singură teorie corectă. Fiecare a prins o bucată din adevăr și fiecare dă profesorului alt instrument. Voi trece prin cinci perspective: behavioristă, umanistă, cognitivă, teoria autodeterminării și teoria autoeficacității.</a:t>
+Mulțumesc. Colega mea a explicat ce este motivația. Eu o să arăt cum au explicat-o psihologii, pentru că nu există o singură teorie corectă. Fiecare a prins o bucată din adevăr și fiecare îi dă profesorului altă unealtă. Trec prin cinci: cea behavioristă, cea umanistă, cea cognitivă, teoria autodeterminării și teoria autoeficacității. Le explic pe rând, pe înțeles.</a:t>
             </a:r>
             <a:endParaRPr lang="en-US" dirty="0"/>
           </a:p>
@@ -4823,7 +4823,7 @@
                   <a:srgbClr val="1F2A44"/>
                 </a:solidFill>
               </a:rPr>
-              <a:t>Motivația = istoricul întăririlor primite</a:t>
+              <a:t>Motivația = tot ce ai primit până acum, recompense și pedepse</a:t>
             </a:r>
             <a:endParaRPr lang="en-US" sz="1600" dirty="0"/>
           </a:p>
@@ -5325,7 +5325,7 @@
                   <a:srgbClr val="1F2A44"/>
                 </a:solidFill>
               </a:rPr>
-              <a:t>Trebuințele sunt ierarhizate: fiziologice, siguranță, apartenență, stimă, autorealizare</a:t>
+              <a:t>Nevoile sunt pe trepte: fiziologice, siguranță, apartenență, stimă, autorealizare</a:t>
             </a:r>
             <a:endParaRPr lang="en-US" sz="1600" dirty="0"/>
           </a:p>
@@ -5343,7 +5343,7 @@
                   <a:srgbClr val="1F2A44"/>
                 </a:solidFill>
               </a:rPr>
-              <a:t>O trebuință superioară apare după satisfacerea celor de bază</a:t>
+              <a:t>Treapta de sus apare abia după ce cele de jos sunt rezolvate</a:t>
             </a:r>
             <a:endParaRPr lang="en-US" sz="1600" dirty="0"/>
           </a:p>
@@ -5867,7 +5867,7 @@
                   <a:srgbClr val="1F2A44"/>
                 </a:solidFill>
               </a:rPr>
-              <a:t>Atkinson: motivația de realizare = nevoia de succes vs. teama de eșec</a:t>
+              <a:t>Atkinson: în noi se bat dorința de a reuși și frica de a greși</a:t>
             </a:r>
             <a:endParaRPr lang="en-US" sz="1600" dirty="0"/>
           </a:p>
@@ -5885,7 +5885,7 @@
                   <a:srgbClr val="1F2A44"/>
                 </a:solidFill>
               </a:rPr>
-              <a:t>Weiner (teoria atribuirii): contează cui atribuim reușita sau eșecul</a:t>
+              <a:t>Weiner (teoria atribuirii): contează pe cine dai vina</a:t>
             </a:r>
             <a:endParaRPr lang="en-US" sz="1600" dirty="0"/>
           </a:p>
@@ -5903,7 +5903,7 @@
                   <a:srgbClr val="1F2A44"/>
                 </a:solidFill>
               </a:rPr>
-              <a:t>Atribuire internă și controlabilă (efortul) susține motivația</a:t>
+              <a:t>„Nu m-am antrenat destul” (depinde de mine) ține motivația</a:t>
             </a:r>
             <a:endParaRPr lang="en-US" sz="1600" dirty="0"/>
           </a:p>
@@ -5921,7 +5921,7 @@
                   <a:srgbClr val="1F2A44"/>
                 </a:solidFill>
               </a:rPr>
-              <a:t>Atribuire externă sau stabilă („n-am talent”, „arbitrul”) o distruge</a:t>
+              <a:t>„N-am talent”, „arbitrul” (nu depinde de mine) o omoară</a:t>
             </a:r>
             <a:endParaRPr lang="en-US" sz="1600" dirty="0"/>
           </a:p>
@@ -6286,7 +6286,7 @@
                   <a:srgbClr val="1F2A44"/>
                 </a:solidFill>
               </a:rPr>
-              <a:t>Trei nevoi psihologice de bază: autonomie, competență, relaționare</a:t>
+              <a:t>Trei nevoi de bază: autonomie (să aleg), competență (să mă descurc), relaționare (să fiu acceptat)</a:t>
             </a:r>
             <a:endParaRPr lang="en-US" sz="1600" dirty="0"/>
           </a:p>
@@ -6304,7 +6304,7 @@
                   <a:srgbClr val="1F2A44"/>
                 </a:solidFill>
               </a:rPr>
-              <a:t>Când sunt satisfăcute, motivația devine intrinsecă și durabilă</a:t>
+              <a:t>Când sunt împlinite, motivația vine din interior și ține</a:t>
             </a:r>
             <a:endParaRPr lang="en-US" sz="1600" dirty="0"/>
           </a:p>
@@ -6322,7 +6322,7 @@
                   <a:srgbClr val="1F2A44"/>
                 </a:solidFill>
               </a:rPr>
-              <a:t>Când sunt frustrate, apare amotivarea</a:t>
+              <a:t>Când nu sunt împlinite, elevul nu mai vede rostul (amotivare)</a:t>
             </a:r>
             <a:endParaRPr lang="en-US" sz="1600" dirty="0"/>
           </a:p>
@@ -6340,7 +6340,7 @@
                   <a:srgbClr val="1F2A44"/>
                 </a:solidFill>
               </a:rPr>
-              <a:t>Continuum: amotivare → extrinsec → intrinsec</a:t>
+              <a:t>O scară: fără motivație → din exterior → din interior</a:t>
             </a:r>
             <a:endParaRPr lang="en-US" sz="1600" dirty="0"/>
           </a:p>
@@ -6770,7 +6770,7 @@
                   <a:srgbClr val="1F2A44"/>
                 </a:solidFill>
               </a:rPr>
-              <a:t>Încrederea că „pot face asta” prezice efortul și perseverența</a:t>
+              <a:t>Încrederea că „pot face asta” spune cât te străduiești și cât reziști</a:t>
             </a:r>
             <a:endParaRPr lang="en-US" sz="1600" dirty="0"/>
           </a:p>
@@ -6788,7 +6788,7 @@
                   <a:srgbClr val="1F2A44"/>
                 </a:solidFill>
               </a:rPr>
-              <a:t>Surse: reușite proprii, modele asemănătoare, încurajare, stare fizică</a:t>
+              <a:t>De unde vine: reușite proprii, cineva ca mine care reușește, încurajare, cum mă simt</a:t>
             </a:r>
             <a:endParaRPr lang="en-US" sz="1600" dirty="0"/>
           </a:p>
@@ -6806,7 +6806,7 @@
                   <a:srgbClr val="1F2A44"/>
                 </a:solidFill>
               </a:rPr>
-              <a:t>Cea mai puternică sursă: experiența reușitei</a:t>
+              <a:t>Cea mai puternică: am reușit eu înainte</a:t>
             </a:r>
             <a:endParaRPr lang="en-US" sz="1600" dirty="0"/>
           </a:p>
@@ -6824,7 +6824,7 @@
                   <a:srgbClr val="1F2A44"/>
                 </a:solidFill>
               </a:rPr>
-              <a:t>Sarcini progresive, cu reușită garantată la început</a:t>
+              <a:t>Sarcini din ce în ce mai grele, cu reușită sigură la început</a:t>
             </a:r>
             <a:endParaRPr lang="en-US" sz="1600" dirty="0"/>
           </a:p>
@@ -7487,7 +7487,7 @@
                   <a:srgbClr val="1F2A44"/>
                 </a:solidFill>
               </a:rPr>
-              <a:t>Elevul: aduce propria structură motivațională (trebuințe, interese, temeri)</a:t>
+              <a:t>Elevul: vine cu ce are el (nevoi, interese, frici)</a:t>
             </a:r>
             <a:endParaRPr lang="en-US" sz="1600" dirty="0"/>
           </a:p>
@@ -7505,7 +7505,7 @@
                   <a:srgbClr val="1F2A44"/>
                 </a:solidFill>
               </a:rPr>
-              <a:t>Profesorul: creează climatul și modelul; propria lui motivație se vede</a:t>
+              <a:t>Profesorul: face atmosfera și e exemplu, motivația lui se vede</a:t>
             </a:r>
             <a:endParaRPr lang="en-US" sz="1600" dirty="0"/>
           </a:p>
@@ -7523,7 +7523,7 @@
                   <a:srgbClr val="1F2A44"/>
                 </a:solidFill>
               </a:rPr>
-              <a:t>Conținutul: devine atractiv sau respingător în funcție de cum e prezentat</a:t>
+              <a:t>Ce e de învățat: place sau nu în funcție de cum e prezentat</a:t>
             </a:r>
             <a:endParaRPr lang="en-US" sz="1600" dirty="0"/>
           </a:p>
@@ -7541,7 +7541,7 @@
                   <a:srgbClr val="1F2A44"/>
                 </a:solidFill>
               </a:rPr>
-              <a:t>Învățarea eficientă apare la intersecția celor trei</a:t>
+              <a:t>Învățarea adevărată e unde se întâlnesc toate trei</a:t>
             </a:r>
             <a:endParaRPr lang="en-US" sz="1600" dirty="0"/>
           </a:p>
@@ -7966,7 +7966,7 @@
                   <a:srgbClr val="1F2A44"/>
                 </a:solidFill>
               </a:rPr>
-              <a:t>Motive cognitive: curiozitatea, nevoia de a înțelege</a:t>
+              <a:t>Motive cognitive: curiozitatea, vrei să înțelegi</a:t>
             </a:r>
             <a:endParaRPr lang="en-US" sz="1600" dirty="0"/>
           </a:p>
@@ -7984,7 +7984,7 @@
                   <a:srgbClr val="1F2A44"/>
                 </a:solidFill>
               </a:rPr>
-              <a:t>Motive afective: dorința de a fi apreciat de profesor și colegi</a:t>
+              <a:t>Motive afective: vrei să te aprecieze profesorul și colegii</a:t>
             </a:r>
             <a:endParaRPr lang="en-US" sz="1600" dirty="0"/>
           </a:p>
@@ -8002,7 +8002,7 @@
                   <a:srgbClr val="1F2A44"/>
                 </a:solidFill>
               </a:rPr>
-              <a:t>Motive de autorealizare: a deveni mai bun, a se depăși</a:t>
+              <a:t>Motive de autorealizare: vrei să fii mai bun, să te depășești</a:t>
             </a:r>
             <a:endParaRPr lang="en-US" sz="1600" dirty="0"/>
           </a:p>
@@ -8535,7 +8535,7 @@
                   <a:srgbClr val="1F2A44"/>
                 </a:solidFill>
               </a:rPr>
-              <a:t>Epuran: în sport motivația se vede direct, în efort fizic măsurabil</a:t>
+              <a:t>Epuran: în sport motivația se vede direct, în efort</a:t>
             </a:r>
             <a:endParaRPr lang="en-US" sz="1600" dirty="0"/>
           </a:p>
@@ -8553,7 +8553,7 @@
                   <a:srgbClr val="1F2A44"/>
                 </a:solidFill>
               </a:rPr>
-              <a:t>Plăcerea mișcării este un motiv intrinsec natural la copii, dar se pierde dacă e sufocată</a:t>
+              <a:t>Copiilor le place să se miște de la natură, dar plăcerea se pierde dacă e sufocată</a:t>
             </a:r>
             <a:endParaRPr lang="en-US" sz="1600" dirty="0"/>
           </a:p>
@@ -8571,7 +8571,7 @@
                   <a:srgbClr val="1F2A44"/>
                 </a:solidFill>
               </a:rPr>
-              <a:t>Competiția motivează pe unii și blochează pe alții</a:t>
+              <a:t>Întrecerea pe unii îi pornește, pe alții îi blochează</a:t>
             </a:r>
             <a:endParaRPr lang="en-US" sz="1600" dirty="0"/>
           </a:p>
@@ -8589,7 +8589,7 @@
                   <a:srgbClr val="1F2A44"/>
                 </a:solidFill>
               </a:rPr>
-              <a:t>Corpul expus privirii celorlalți: rușinea e un demotivator major la adolescenți</a:t>
+              <a:t>Corpul e la vedere: la adolescenți rușinea e o frână mare</a:t>
             </a:r>
             <a:endParaRPr lang="en-US" sz="1600" dirty="0"/>
           </a:p>
@@ -8860,7 +8860,7 @@
                   <a:srgbClr val="1F2A44"/>
                 </a:solidFill>
               </a:rPr>
-              <a:t>Climat de măiestrie: succesul = progresul propriu, efortul, învățarea</a:t>
+              <a:t>Climat de măiestrie: reușita = ai progresat tu, te-ai străduit, ai învățat</a:t>
             </a:r>
             <a:endParaRPr lang="en-US" sz="1600" dirty="0"/>
           </a:p>
@@ -8878,7 +8878,7 @@
                   <a:srgbClr val="1F2A44"/>
                 </a:solidFill>
               </a:rPr>
-              <a:t>Climat de ego: succesul = a fi mai bun decât ceilalți</a:t>
+              <a:t>Climat de ego: reușita = ești mai bun decât ceilalți</a:t>
             </a:r>
             <a:endParaRPr lang="en-US" sz="1600" dirty="0"/>
           </a:p>
@@ -8896,7 +8896,7 @@
                   <a:srgbClr val="1F2A44"/>
                 </a:solidFill>
               </a:rPr>
-              <a:t>Măiestria produce perseverență, plăcere, mai puțină anxietate</a:t>
+              <a:t>Măiestria aduce rezistență, plăcere, mai puține emoții</a:t>
             </a:r>
             <a:endParaRPr lang="en-US" sz="1600" dirty="0"/>
           </a:p>
@@ -8914,7 +8914,7 @@
                   <a:srgbClr val="1F2A44"/>
                 </a:solidFill>
               </a:rPr>
-              <a:t>Ego-ul motivează doar pe cei câțiva care câștigă mereu</a:t>
+              <a:t>Ego-ul îi pornește doar pe cei câțiva care câștigă mereu</a:t>
             </a:r>
             <a:endParaRPr lang="en-US" sz="1600" dirty="0"/>
           </a:p>
@@ -10271,7 +10271,7 @@
                   <a:srgbClr val="1F2A44"/>
                 </a:solidFill>
               </a:rPr>
-              <a:t>Task: sarcini variate, cu dificultate adaptată</a:t>
+              <a:t>Task: sarcini variate, pe măsura fiecăruia</a:t>
             </a:r>
             <a:endParaRPr lang="en-US" sz="1600" dirty="0"/>
           </a:p>
@@ -10307,7 +10307,7 @@
                   <a:srgbClr val="1F2A44"/>
                 </a:solidFill>
               </a:rPr>
-              <a:t>Recognition: recunoașterea progresului, în privat</a:t>
+              <a:t>Recognition: lauzi progresul, între patru ochi</a:t>
             </a:r>
             <a:endParaRPr lang="en-US" sz="1600" dirty="0"/>
           </a:p>
@@ -10343,7 +10343,7 @@
                   <a:srgbClr val="1F2A44"/>
                 </a:solidFill>
               </a:rPr>
-              <a:t>Evaluation: raportată la propriul progres</a:t>
+              <a:t>Evaluation: față de propriul progres, nu față de ceilalți</a:t>
             </a:r>
             <a:endParaRPr lang="en-US" sz="1600" dirty="0"/>
           </a:p>
@@ -11305,7 +11305,7 @@
                   <a:srgbClr val="1F2A44"/>
                 </a:solidFill>
               </a:rPr>
-              <a:t>Obiective concrete și măsurabile, nu „fă tot ce poți”</a:t>
+              <a:t>Obiective concrete, pe care le poți număra, nu „fă tot ce poți”</a:t>
             </a:r>
             <a:endParaRPr lang="en-US" sz="1600" dirty="0"/>
           </a:p>
@@ -11341,7 +11341,7 @@
                   <a:srgbClr val="1F2A44"/>
                 </a:solidFill>
               </a:rPr>
-              <a:t>Dificultate moderată: puțin peste ce poate acum</a:t>
+              <a:t>Greutate potrivită: puțin peste ce poate acum</a:t>
             </a:r>
             <a:endParaRPr lang="en-US" sz="1600" dirty="0"/>
           </a:p>
@@ -11359,7 +11359,7 @@
                   <a:srgbClr val="1F2A44"/>
                 </a:solidFill>
               </a:rPr>
-              <a:t>Elevul își fixează singur o parte din obiective</a:t>
+              <a:t>Elevul își pune singur o parte din obiective</a:t>
             </a:r>
             <a:endParaRPr lang="en-US" sz="1600" dirty="0"/>
           </a:p>
@@ -11760,7 +11760,7 @@
                   <a:srgbClr val="1F2A44"/>
                 </a:solidFill>
               </a:rPr>
-              <a:t>Imediat, concret, legat de comportament: „genunchii mai sus”, nu „mai bine”</a:t>
+              <a:t>Pe loc, concret, despre ce a făcut: „genunchii mai sus”, nu „mai bine”</a:t>
             </a:r>
             <a:endParaRPr lang="en-US" sz="1600" dirty="0"/>
           </a:p>
@@ -11796,7 +11796,7 @@
                   <a:srgbClr val="1F2A44"/>
                 </a:solidFill>
               </a:rPr>
-              <a:t>Raport 3 la 1: trei observații pozitive la una corectivă</a:t>
+              <a:t>Trei la unu: trei lucruri bune la unul de corectat</a:t>
             </a:r>
             <a:endParaRPr lang="en-US" sz="1600" dirty="0"/>
           </a:p>
@@ -11814,7 +11814,7 @@
                   <a:srgbClr val="1F2A44"/>
                 </a:solidFill>
               </a:rPr>
-              <a:t>Recompensele extrinseci: rar, pentru progres, nu pentru a fi primul</a:t>
+              <a:t>Recompensele: rar, pentru progres, nu pentru locul întâi</a:t>
             </a:r>
             <a:endParaRPr lang="en-US" sz="1600" dirty="0"/>
           </a:p>
@@ -12152,7 +12152,7 @@
                   <a:srgbClr val="1F2A44"/>
                 </a:solidFill>
               </a:rPr>
-              <a:t>Oferă alegeri: între două exerciții, ordinea stațiilor, partenerul</a:t>
+              <a:t>Dă de ales: între două exerciții, ordinea stațiilor, partenerul</a:t>
             </a:r>
             <a:endParaRPr lang="en-US" sz="1600" dirty="0"/>
           </a:p>
@@ -12188,7 +12188,7 @@
                   <a:srgbClr val="1F2A44"/>
                 </a:solidFill>
               </a:rPr>
-              <a:t>Jocul: cel mai puternic motivator intrinsec la toate vârstele</a:t>
+              <a:t>Jocul: cel mai puternic motor, la toate vârstele</a:t>
             </a:r>
             <a:endParaRPr lang="en-US" sz="1600" dirty="0"/>
           </a:p>
@@ -12206,7 +12206,7 @@
                   <a:srgbClr val="1F2A44"/>
                 </a:solidFill>
               </a:rPr>
-              <a:t>Învățarea prin descoperire: lasă elevul să găsească soluția</a:t>
+              <a:t>Învățarea prin descoperire: îl lași pe elev să găsească soluția</a:t>
             </a:r>
             <a:endParaRPr lang="en-US" sz="1600" dirty="0"/>
           </a:p>
@@ -12636,7 +12636,7 @@
                   <a:srgbClr val="1F2A44"/>
                 </a:solidFill>
               </a:rPr>
-              <a:t>Entuziasmul profesorului este contagios; la fel și plictiseala</a:t>
+              <a:t>Entuziasmul profesorului se ia, la fel și plictiseala</a:t>
             </a:r>
             <a:endParaRPr lang="en-US" sz="1600" dirty="0"/>
           </a:p>
@@ -12654,7 +12654,7 @@
                   <a:srgbClr val="1F2A44"/>
                 </a:solidFill>
               </a:rPr>
-              <a:t>Umor, nume folosite, atenție la fiecare: nevoia de relaționare</a:t>
+              <a:t>O glumă, nume spuse, un cuvânt pentru fiecare: elevul se simte al grupului</a:t>
             </a:r>
             <a:endParaRPr lang="en-US" sz="1600" dirty="0"/>
           </a:p>
@@ -12672,7 +12672,7 @@
                   <a:srgbClr val="1F2A44"/>
                 </a:solidFill>
               </a:rPr>
-              <a:t>Greșeala este normală și necesară, nu motiv de rușine</a:t>
+              <a:t>Greșeala e normală, face parte din învățat, nu e motiv de rușine</a:t>
             </a:r>
             <a:endParaRPr lang="en-US" sz="1600" dirty="0"/>
           </a:p>
@@ -12690,7 +12690,7 @@
                   <a:srgbClr val="1F2A44"/>
                 </a:solidFill>
               </a:rPr>
-              <a:t>Fără ridiculizare, fără comparații publice</a:t>
+              <a:t>Nu faci pe nimeni de râs, nu compari în fața clasei</a:t>
             </a:r>
             <a:endParaRPr lang="en-US" sz="1600" dirty="0"/>
           </a:p>
@@ -13034,7 +13034,7 @@
                   <a:srgbClr val="1F2A44"/>
                 </a:solidFill>
               </a:rPr>
-              <a:t>Diagnostic: experiențe repetate de eșec public, autoeficacitate scăzută, teamă de ridicol</a:t>
+              <a:t>Ce aflăm: a greșit de multe ori în fața tuturor, nu mai crede că poate, îi e frică să nu râdă lumea</a:t>
             </a:r>
             <a:endParaRPr lang="en-US" sz="1600" dirty="0"/>
           </a:p>
@@ -13052,7 +13052,7 @@
                   <a:srgbClr val="1F2A44"/>
                 </a:solidFill>
               </a:rPr>
-              <a:t>Intervenție: sarcini cu reușită garantată, rol în echipă (arbitru, apoi jucător), feedback pe efort, fără expunere publică</a:t>
+              <a:t>Ce facem: sarcini la care sigur reușește, rol în echipă (arbitru, apoi jucător), laudă pe efort, fără expunere în fața clasei</a:t>
             </a:r>
             <a:endParaRPr lang="en-US" sz="1600" dirty="0"/>
           </a:p>
@@ -13070,7 +13070,7 @@
                   <a:srgbClr val="1F2A44"/>
                 </a:solidFill>
               </a:rPr>
-              <a:t>Rezultat în 6 săptămâni: participă, propune el jocuri</a:t>
+              <a:t>După 6 săptămâni: vine la toate orele, propune el jocuri</a:t>
             </a:r>
             <a:endParaRPr lang="en-US" sz="1600" dirty="0"/>
           </a:p>
@@ -14673,7 +14673,7 @@
                   <a:srgbClr val="2F3C7E"/>
                 </a:solidFill>
               </a:rPr>
-              <a:t>Motivația transformă capacitatea în rezultat</a:t>
+              <a:t>Motivația face dintr-un „pot” un „fac”</a:t>
             </a:r>
             <a:endParaRPr lang="en-US" sz="1600" dirty="0"/>
           </a:p>
@@ -14709,7 +14709,7 @@
                   <a:srgbClr val="6B7280"/>
                 </a:solidFill>
               </a:rPr>
-              <a:t>fără ea, talentul rămâne nefolosit</a:t>
+              <a:t>fără ea, talentul stă degeaba</a:t>
             </a:r>
             <a:endParaRPr lang="en-US" sz="1200" dirty="0"/>
           </a:p>
@@ -14808,7 +14808,7 @@
                   <a:srgbClr val="2F3C7E"/>
                 </a:solidFill>
               </a:rPr>
-              <a:t>Fiecare teorie dă un instrument</a:t>
+              <a:t>Fiecare teorie îi dă profesorului câte ceva</a:t>
             </a:r>
             <a:endParaRPr lang="en-US" sz="1600" dirty="0"/>
           </a:p>
@@ -14844,7 +14844,7 @@
                   <a:srgbClr val="6B7280"/>
                 </a:solidFill>
               </a:rPr>
-              <a:t>feedback, siguranță, atribuire, autonomie, progresie</a:t>
+              <a:t>feedback, siguranță, pe cine dai vina, de ales, sarcini crescătoare</a:t>
             </a:r>
             <a:endParaRPr lang="en-US" sz="1200" dirty="0"/>
           </a:p>
@@ -14943,7 +14943,7 @@
                   <a:srgbClr val="2F3C7E"/>
                 </a:solidFill>
               </a:rPr>
-              <a:t>Climatul se construiește în fiecare oră</a:t>
+              <a:t>Atmosfera se face în fiecare oră</a:t>
             </a:r>
             <a:endParaRPr lang="en-US" sz="1600" dirty="0"/>
           </a:p>
@@ -15078,7 +15078,7 @@
                   <a:srgbClr val="FFFFFF"/>
                 </a:solidFill>
               </a:rPr>
-              <a:t>Profesorul nu împinge, creează condiții</a:t>
+              <a:t>Profesorul nu împinge, face condițiile</a:t>
             </a:r>
             <a:endParaRPr lang="en-US" sz="1600" dirty="0"/>
           </a:p>
@@ -15114,7 +15114,7 @@
                   <a:srgbClr val="E8EAF3"/>
                 </a:solidFill>
               </a:rPr>
-              <a:t>elevii se motivează singuri când au autonomie, competență și apartenență</a:t>
+              <a:t>elevii se motivează singuri când pot alege, se descurcă și se simt ai grupului</a:t>
             </a:r>
             <a:endParaRPr lang="en-US" sz="1200" dirty="0"/>
           </a:p>
@@ -15878,7 +15878,7 @@
                   <a:srgbClr val="1F2A44"/>
                 </a:solidFill>
               </a:rPr>
-              <a:t>Ansamblul factorilor interni care declanșează, orientează și mențin comportamentul</a:t>
+              <a:t>Tot ce ne pune în mișcare din interior, ne dă o direcție și ne ține pe drum</a:t>
             </a:r>
             <a:endParaRPr lang="en-US" sz="1600" dirty="0"/>
           </a:p>
@@ -16275,7 +16275,7 @@
                   <a:srgbClr val="1F2A44"/>
                 </a:solidFill>
               </a:rPr>
-              <a:t>Trebuințe: lipsa a ceva, resimțită ca tensiune (apă, mișcare, apartenență)</a:t>
+              <a:t>Trebuințe: îți lipsește ceva și simți asta (apă, mișcare, un grup)</a:t>
             </a:r>
             <a:endParaRPr lang="en-US" sz="1600" dirty="0"/>
           </a:p>
@@ -16293,7 +16293,7 @@
                   <a:srgbClr val="1F2A44"/>
                 </a:solidFill>
               </a:rPr>
-              <a:t>Motive: trebuința devenită conștientă, care împinge spre acțiune</a:t>
+              <a:t>Motive: știi ce îți lipsește și asta te împinge să faci ceva</a:t>
             </a:r>
             <a:endParaRPr lang="en-US" sz="1600" dirty="0"/>
           </a:p>
@@ -16311,7 +16311,7 @@
                   <a:srgbClr val="1F2A44"/>
                 </a:solidFill>
               </a:rPr>
-              <a:t>Interese: orientări stabile spre un domeniu (sportul, muzica)</a:t>
+              <a:t>Interese: spre ce te tragi mereu (sportul, muzica)</a:t>
             </a:r>
             <a:endParaRPr lang="en-US" sz="1600" dirty="0"/>
           </a:p>
@@ -16329,7 +16329,7 @@
                   <a:srgbClr val="1F2A44"/>
                 </a:solidFill>
               </a:rPr>
-              <a:t>Convingeri: idei cu încărcătură afectivă, pe care le apărăm</a:t>
+              <a:t>Convingeri: idei la care ții și pe care le aperi</a:t>
             </a:r>
             <a:endParaRPr lang="en-US" sz="1600" dirty="0"/>
           </a:p>
@@ -16347,7 +16347,7 @@
                   <a:srgbClr val="1F2A44"/>
                 </a:solidFill>
               </a:rPr>
-              <a:t>Idealuri și aspirații: modelul de viață spre care tindem</a:t>
+              <a:t>Idealuri: cum ai vrea să fii și ce ai vrea să ajungi</a:t>
             </a:r>
             <a:endParaRPr lang="en-US" sz="1600" dirty="0"/>
           </a:p>
@@ -16835,7 +16835,7 @@
                   <a:srgbClr val="1F2A44"/>
                 </a:solidFill>
               </a:rPr>
-              <a:t>Activare: scoate organismul din starea de repaus</a:t>
+              <a:t>Activare: te scoate din stat, îți dă energie</a:t>
             </a:r>
             <a:endParaRPr lang="en-US" sz="1600" dirty="0"/>
           </a:p>
@@ -16871,7 +16871,7 @@
                   <a:srgbClr val="1F2A44"/>
                 </a:solidFill>
               </a:rPr>
-              <a:t>Susținere: menține efortul în timp, în ciuda obstacolelor</a:t>
+              <a:t>Susținere: ține efortul în timp, chiar cu piedici</a:t>
             </a:r>
             <a:endParaRPr lang="en-US" sz="1600" dirty="0"/>
           </a:p>
@@ -16889,7 +16889,7 @@
                   <a:srgbClr val="1F2A44"/>
                 </a:solidFill>
               </a:rPr>
-              <a:t>Reglare: ajustează intensitatea efortului după situație</a:t>
+              <a:t>Reglare: potrivește efortul după situație</a:t>
             </a:r>
             <a:endParaRPr lang="en-US" sz="1600" dirty="0"/>
           </a:p>
@@ -17404,7 +17404,7 @@
                   <a:srgbClr val="1F2A44"/>
                 </a:solidFill>
               </a:rPr>
-              <a:t>Intrinsecă: activitatea e răsplata în sine (plăcerea jocului, curiozitatea)</a:t>
+              <a:t>Intrinsecă (din interior): îți place lucrul în sine (jocul, curiozitatea)</a:t>
             </a:r>
             <a:endParaRPr lang="en-US" sz="1600" dirty="0"/>
           </a:p>
@@ -17422,7 +17422,7 @@
                   <a:srgbClr val="1F2A44"/>
                 </a:solidFill>
               </a:rPr>
-              <a:t>Extrinsecă: scopul e în afara activității (nota, lauda, medalia, evitarea pedepsei)</a:t>
+              <a:t>Extrinsecă (din exterior): o faci pentru ceva din afară (nota, lauda, medalia, să scapi de pedeapsă)</a:t>
             </a:r>
             <a:endParaRPr lang="en-US" sz="1600" dirty="0"/>
           </a:p>
@@ -17458,7 +17458,7 @@
                   <a:srgbClr val="1F2A44"/>
                 </a:solidFill>
               </a:rPr>
-              <a:t>Intrinseca dă rezultate mai durabile; extrinseca pornește motorul când lipsește cea intrinsecă</a:t>
+              <a:t>Cea din interior ține mai mult, cea din exterior pornește motorul când lipsește prima</a:t>
             </a:r>
             <a:endParaRPr lang="en-US" sz="1600" dirty="0"/>
           </a:p>
@@ -17595,7 +17595,7 @@
       </p:pic>
       <p:sp>
         <p:nvSpPr>
-          <p:cNvPr id="9" name="Eticheta Intrinsecă"/>
+          <p:cNvPr id="9" name="Eticheta Intrinsecă (din inte"/>
           <p:cNvSpPr txBox="1"/>
           <p:nvPr/>
         </p:nvSpPr>
@@ -17623,7 +17623,7 @@
                   <a:srgbClr val="FFFFFF"/>
                 </a:solidFill>
               </a:rPr>
-              <a:t>Intrinsecă</a:t>
+              <a:t>Intrinsecă (din interior)</a:t>
             </a:r>
             <a:endParaRPr lang="en-US" sz="1400" dirty="0"/>
           </a:p>
@@ -17631,7 +17631,7 @@
       </p:sp>
       <p:sp>
         <p:nvSpPr>
-          <p:cNvPr id="10" name="Eticheta Extrinsecă"/>
+          <p:cNvPr id="10" name="Eticheta Extrinsecă (din exte"/>
           <p:cNvSpPr txBox="1"/>
           <p:nvPr/>
         </p:nvSpPr>
@@ -17659,7 +17659,7 @@
                   <a:srgbClr val="FFFFFF"/>
                 </a:solidFill>
               </a:rPr>
-              <a:t>Extrinsecă</a:t>
+              <a:t>Extrinsecă (din exterior)</a:t>
             </a:r>
             <a:endParaRPr lang="en-US" sz="1400" dirty="0"/>
           </a:p>
@@ -17897,7 +17897,7 @@
                   <a:srgbClr val="1F2A44"/>
                 </a:solidFill>
               </a:rPr>
-              <a:t>Submotivare: plictiseală, efort mic, rezultate slabe</a:t>
+              <a:t>Prea puțină motivație: plictiseală, efort mic, rezultate slabe</a:t>
             </a:r>
             <a:endParaRPr lang="en-US" sz="1600" dirty="0"/>
           </a:p>
@@ -17915,7 +17915,7 @@
                   <a:srgbClr val="1F2A44"/>
                 </a:solidFill>
               </a:rPr>
-              <a:t>Supramotivare: anxietate, crispare, greșeli (sportivul care „îngheață” la concurs)</a:t>
+              <a:t>Prea multă motivație: emoții, crispare, greșeli (sportivul care „îngheață” la concurs)</a:t>
             </a:r>
             <a:endParaRPr lang="en-US" sz="1600" dirty="0"/>
           </a:p>
@@ -17933,7 +17933,7 @@
                   <a:srgbClr val="1F2A44"/>
                 </a:solidFill>
               </a:rPr>
-              <a:t>Sarcini simple suportă motivație mare; sarcinile complexe cer motivație moderată</a:t>
+              <a:t>La sarcini simple merge motivație mare, la cele complicate e nevoie de una potrivită</a:t>
             </a:r>
             <a:endParaRPr lang="en-US" sz="1600" dirty="0"/>
           </a:p>
